--- a/In/Template/InPreD_MTB_template.pptx
+++ b/In/Template/InPreD_MTB_template.pptx
@@ -21600,48 +21600,6 @@
       </p:sp>
       <p:sp>
         <p:nvSpPr>
-          <p:cNvPr id="65" name="TekstSylinder 64"/>
-          <p:cNvSpPr txBox="1"/>
-          <p:nvPr/>
-        </p:nvSpPr>
-        <p:spPr>
-          <a:xfrm>
-            <a:off x="6908202" y="2886808"/>
-            <a:ext cx="2091786" cy="830997"/>
-          </a:xfrm>
-          <a:prstGeom prst="rect">
-            <a:avLst/>
-          </a:prstGeom>
-          <a:noFill/>
-        </p:spPr>
-        <p:txBody>
-          <a:bodyPr wrap="square" rtlCol="0">
-            <a:spAutoFit/>
-          </a:bodyPr>
-          <a:lstStyle/>
-          <a:p>
-            <a:r>
-              <a:rPr lang="en-US" sz="800" i="1" dirty="0">
-                <a:solidFill>
-                  <a:srgbClr val="00B0F0"/>
-                </a:solidFill>
-              </a:rPr>
-              <a:t>¤</a:t>
-            </a:r>
-            <a:r>
-              <a:rPr lang="en-US" sz="800" i="1" dirty="0"/>
-              <a:t> : F</a:t>
-            </a:r>
-            <a:r>
-              <a:rPr lang="en-US" sz="800" i="1" dirty="0" smtClean="0"/>
-              <a:t>ollowing ESMO guidelines, recommendation for germline testing is borderline with respect to age/tumor type. Treating oncologist may consider discussing this with patient and offer referral to genetic counseling. </a:t>
-            </a:r>
-            <a:endParaRPr lang="en-US" sz="800" i="1" dirty="0"/>
-          </a:p>
-        </p:txBody>
-      </p:sp>
-      <p:sp>
-        <p:nvSpPr>
           <p:cNvPr id="69" name="TekstSylinder 68"/>
           <p:cNvSpPr txBox="1"/>
           <p:nvPr/>
@@ -21678,7 +21636,7 @@
         </p:nvSpPr>
         <p:spPr>
           <a:xfrm>
-            <a:off x="8077940" y="4443958"/>
+            <a:off x="8077940" y="3941673"/>
             <a:ext cx="922047" cy="215444"/>
           </a:xfrm>
           <a:prstGeom prst="rect">
@@ -21713,7 +21671,7 @@
         </p:nvSpPr>
         <p:spPr>
           <a:xfrm>
-            <a:off x="7717940" y="4492431"/>
+            <a:off x="7717940" y="3990146"/>
             <a:ext cx="360000" cy="118498"/>
           </a:xfrm>
           <a:prstGeom prst="roundRect">
@@ -21762,7 +21720,7 @@
         </p:nvSpPr>
         <p:spPr>
           <a:xfrm>
-            <a:off x="7614444" y="4621783"/>
+            <a:off x="7614444" y="4119498"/>
             <a:ext cx="700833" cy="461665"/>
           </a:xfrm>
           <a:prstGeom prst="rect">
@@ -23135,7 +23093,7 @@
         <p:spPr>
           <a:xfrm>
             <a:off x="6881450" y="1878925"/>
-            <a:ext cx="1966988" cy="461665"/>
+            <a:ext cx="1966988" cy="460375"/>
           </a:xfrm>
           <a:prstGeom prst="rect">
             <a:avLst/>
@@ -23158,7 +23116,15 @@
             </a:r>
             <a:r>
               <a:rPr lang="en-US" sz="800" i="1" dirty="0"/>
-              <a:t> : According to ESMO guidelines, genetic counseling is recommended for the reported XX variant.</a:t>
+              <a:t> : According to ESMO guidelines, genetic </a:t>
+            </a:r>
+            <a:r>
+              <a:rPr lang="nb-NO" altLang="en-US" sz="800" i="1" dirty="0"/>
+              <a:t>testing </a:t>
+            </a:r>
+            <a:r>
+              <a:rPr lang="en-US" sz="800" i="1" dirty="0"/>
+              <a:t>is recommended for the reported XX variant.</a:t>
             </a:r>
             <a:endParaRPr lang="en-US" sz="800" i="1" dirty="0"/>
           </a:p>
@@ -24770,7 +24736,7 @@
         </p:nvSpPr>
         <p:spPr>
           <a:xfrm>
-            <a:off x="6878980" y="3870656"/>
+            <a:off x="6878980" y="3081351"/>
             <a:ext cx="2373185" cy="460375"/>
           </a:xfrm>
           <a:prstGeom prst="rect">

--- a/In/Template/InPreD_MTB_template.pptx
+++ b/In/Template/InPreD_MTB_template.pptx
@@ -12396,87 +12396,6 @@
       </p:sp>
       <p:sp>
         <p:nvSpPr>
-          <p:cNvPr id="131" name="Rectangle 80"/>
-          <p:cNvSpPr/>
-          <p:nvPr/>
-        </p:nvSpPr>
-        <p:spPr>
-          <a:xfrm>
-            <a:off x="3975800" y="1623394"/>
-            <a:ext cx="1188146" cy="184666"/>
-          </a:xfrm>
-          <a:prstGeom prst="rect">
-            <a:avLst/>
-          </a:prstGeom>
-        </p:spPr>
-        <p:txBody>
-          <a:bodyPr wrap="none">
-            <a:spAutoFit/>
-          </a:bodyPr>
-          <a:lstStyle/>
-          <a:p>
-            <a:r>
-              <a:rPr lang="en-US" sz="600" i="1" dirty="0" smtClean="0">
-                <a:solidFill>
-                  <a:schemeClr val="tx1">
-                    <a:lumMod val="65000"/>
-                    <a:lumOff val="35000"/>
-                  </a:schemeClr>
-                </a:solidFill>
-              </a:rPr>
-              <a:t>Potentially overestimated TMB*</a:t>
-            </a:r>
-            <a:endParaRPr lang="en-US" sz="600" i="1" dirty="0">
-              <a:solidFill>
-                <a:schemeClr val="tx1">
-                  <a:lumMod val="65000"/>
-                  <a:lumOff val="35000"/>
-                </a:schemeClr>
-              </a:solidFill>
-            </a:endParaRPr>
-          </a:p>
-        </p:txBody>
-      </p:sp>
-      <p:sp>
-        <p:nvSpPr>
-          <p:cNvPr id="132" name="TextBox 81"/>
-          <p:cNvSpPr txBox="1"/>
-          <p:nvPr/>
-        </p:nvSpPr>
-        <p:spPr>
-          <a:xfrm>
-            <a:off x="3901951" y="1571012"/>
-            <a:ext cx="144016" cy="261610"/>
-          </a:xfrm>
-          <a:prstGeom prst="rect">
-            <a:avLst/>
-          </a:prstGeom>
-          <a:noFill/>
-        </p:spPr>
-        <p:txBody>
-          <a:bodyPr wrap="square" rtlCol="0">
-            <a:spAutoFit/>
-          </a:bodyPr>
-          <a:lstStyle/>
-          <a:p>
-            <a:r>
-              <a:rPr lang="en-US" sz="1100" dirty="0" smtClean="0">
-                <a:solidFill>
-                  <a:srgbClr val="FFC000"/>
-                </a:solidFill>
-              </a:rPr>
-              <a:t>o</a:t>
-            </a:r>
-            <a:endParaRPr lang="en-US" sz="1100" dirty="0">
-              <a:solidFill>
-                <a:srgbClr val="FFC000"/>
-              </a:solidFill>
-            </a:endParaRPr>
-          </a:p>
-        </p:txBody>
-      </p:sp>
-      <p:sp>
-        <p:nvSpPr>
           <p:cNvPr id="103" name="TextBox 54"/>
           <p:cNvSpPr txBox="1"/>
           <p:nvPr/>
@@ -15338,87 +15257,6 @@
       </p:sp>
       <p:sp>
         <p:nvSpPr>
-          <p:cNvPr id="131" name="Rectangle 80"/>
-          <p:cNvSpPr/>
-          <p:nvPr/>
-        </p:nvSpPr>
-        <p:spPr>
-          <a:xfrm>
-            <a:off x="3975800" y="1623394"/>
-            <a:ext cx="1188146" cy="184666"/>
-          </a:xfrm>
-          <a:prstGeom prst="rect">
-            <a:avLst/>
-          </a:prstGeom>
-        </p:spPr>
-        <p:txBody>
-          <a:bodyPr wrap="none">
-            <a:spAutoFit/>
-          </a:bodyPr>
-          <a:lstStyle/>
-          <a:p>
-            <a:r>
-              <a:rPr lang="en-US" sz="600" i="1" dirty="0" smtClean="0">
-                <a:solidFill>
-                  <a:schemeClr val="tx1">
-                    <a:lumMod val="65000"/>
-                    <a:lumOff val="35000"/>
-                  </a:schemeClr>
-                </a:solidFill>
-              </a:rPr>
-              <a:t>Potentially overestimated TMB*</a:t>
-            </a:r>
-            <a:endParaRPr lang="en-US" sz="600" i="1" dirty="0">
-              <a:solidFill>
-                <a:schemeClr val="tx1">
-                  <a:lumMod val="65000"/>
-                  <a:lumOff val="35000"/>
-                </a:schemeClr>
-              </a:solidFill>
-            </a:endParaRPr>
-          </a:p>
-        </p:txBody>
-      </p:sp>
-      <p:sp>
-        <p:nvSpPr>
-          <p:cNvPr id="132" name="TextBox 81"/>
-          <p:cNvSpPr txBox="1"/>
-          <p:nvPr/>
-        </p:nvSpPr>
-        <p:spPr>
-          <a:xfrm>
-            <a:off x="3901951" y="1571012"/>
-            <a:ext cx="144016" cy="261610"/>
-          </a:xfrm>
-          <a:prstGeom prst="rect">
-            <a:avLst/>
-          </a:prstGeom>
-          <a:noFill/>
-        </p:spPr>
-        <p:txBody>
-          <a:bodyPr wrap="square" rtlCol="0">
-            <a:spAutoFit/>
-          </a:bodyPr>
-          <a:lstStyle/>
-          <a:p>
-            <a:r>
-              <a:rPr lang="en-US" sz="1100" dirty="0" smtClean="0">
-                <a:solidFill>
-                  <a:srgbClr val="FFC000"/>
-                </a:solidFill>
-              </a:rPr>
-              <a:t>o</a:t>
-            </a:r>
-            <a:endParaRPr lang="en-US" sz="1100" dirty="0">
-              <a:solidFill>
-                <a:srgbClr val="FFC000"/>
-              </a:solidFill>
-            </a:endParaRPr>
-          </a:p>
-        </p:txBody>
-      </p:sp>
-      <p:sp>
-        <p:nvSpPr>
           <p:cNvPr id="103" name="TextBox 54"/>
           <p:cNvSpPr txBox="1"/>
           <p:nvPr/>
@@ -21607,7 +21445,7 @@
         <p:spPr>
           <a:xfrm>
             <a:off x="6878980" y="2382866"/>
-            <a:ext cx="1966988" cy="461665"/>
+            <a:ext cx="1966988" cy="460375"/>
           </a:xfrm>
           <a:prstGeom prst="rect">
             <a:avLst/>
@@ -21622,9 +21460,29 @@
           <a:p>
             <a:r>
               <a:rPr lang="en-US" sz="800" i="1" dirty="0" smtClean="0"/>
-              <a:t>According to ESMO guidelines, recommendation for genetic counseling does not apply for the variants reported</a:t>
-            </a:r>
-            <a:endParaRPr lang="en-US" sz="800" i="1" dirty="0"/>
+              <a:t>According to ESMO </a:t>
+            </a:r>
+            <a:r>
+              <a:rPr lang="nb-NO" altLang="en-US" sz="800" i="1" dirty="0" smtClean="0"/>
+              <a:t>2019 </a:t>
+            </a:r>
+            <a:r>
+              <a:rPr lang="en-US" sz="800" i="1" dirty="0" smtClean="0"/>
+              <a:t>guidelines, recommendation for genetic </a:t>
+            </a:r>
+            <a:r>
+              <a:rPr lang="nb-NO" altLang="en-US" sz="800" i="1" dirty="0" smtClean="0"/>
+              <a:t>testing </a:t>
+            </a:r>
+            <a:r>
+              <a:rPr lang="en-US" sz="800" i="1" dirty="0" smtClean="0"/>
+              <a:t>does not apply for the variants reported</a:t>
+            </a:r>
+            <a:r>
+              <a:rPr lang="nb-NO" altLang="en-US" sz="800" i="1" dirty="0" smtClean="0"/>
+              <a:t>.</a:t>
+            </a:r>
+            <a:endParaRPr lang="nb-NO" altLang="en-US" sz="800" i="1" dirty="0" smtClean="0"/>
           </a:p>
         </p:txBody>
       </p:sp>
